--- a/docs/decks/LedgeRX-UAFinance-CTO-Briefing.pptx
+++ b/docs/decks/LedgeRX-UAFinance-CTO-Briefing.pptx
@@ -28,6 +28,9 @@
     <p:sldId id="276" r:id="rId22"/>
     <p:sldId id="277" r:id="rId23"/>
     <p:sldId id="278" r:id="rId24"/>
+    <p:sldId id="279" r:id="rId30"/>
+    <p:sldId id="280" r:id="rId31"/>
+    <p:sldId id="281" r:id="rId32"/>
   </p:sldIdLst>
   <p:notesMasterIdLst>
     <p:notesMasterId r:id="rId25"/>
@@ -24719,6 +24722,361 @@
 </p:sld>
 </file>
 
+<file path=ppt/slides/slide24.xml><?xml version="1.0" encoding="utf-8"?>
+<p:sld xmlns:a="http://schemas.openxmlformats.org/drawingml/2006/main" xmlns:p="http://schemas.openxmlformats.org/presentationml/2006/main" xmlns:r="http://schemas.openxmlformats.org/officeDocument/2006/relationships">
+  <p:cSld>
+    <p:spTree>
+      <p:nvGrpSpPr>
+        <p:cNvPr id="1" name=""/>
+        <p:cNvGrpSpPr/>
+        <p:nvPr/>
+      </p:nvGrpSpPr>
+      <p:grpSpPr/>
+      <p:sp>
+        <p:nvSpPr>
+          <p:cNvPr id="2" name="Rectangle 1"/>
+          <p:cNvSpPr/>
+          <p:nvPr/>
+        </p:nvSpPr>
+        <p:spPr>
+          <a:xfrm>
+            <a:off x="0" y="0"/>
+            <a:ext cx="12192000" cy="6858000"/>
+          </a:xfrm>
+          <a:prstGeom prst="rect">
+            <a:avLst/>
+          </a:prstGeom>
+          <a:solidFill>
+            <a:srgbClr val="0C2340"/>
+          </a:solidFill>
+          <a:ln>
+            <a:noFill/>
+          </a:ln>
+        </p:spPr>
+        <p:style>
+          <a:lnRef idx="1">
+            <a:schemeClr val="accent1"/>
+          </a:lnRef>
+          <a:fillRef idx="3">
+            <a:schemeClr val="accent1"/>
+          </a:fillRef>
+          <a:effectRef idx="2">
+            <a:schemeClr val="accent1"/>
+          </a:effectRef>
+          <a:fontRef idx="minor">
+            <a:schemeClr val="lt1"/>
+          </a:fontRef>
+        </p:style>
+        <p:txBody>
+          <a:bodyPr rtlCol="0" anchor="ctr"/>
+          <a:lstStyle/>
+          <a:p>
+            <a:pPr algn="ctr"/>
+          </a:p>
+        </p:txBody>
+      </p:sp>
+      <p:sp>
+        <p:nvSpPr>
+          <p:cNvPr id="3" name="TextBox 2"/>
+          <p:cNvSpPr txBox="1"/>
+          <p:nvPr/>
+        </p:nvSpPr>
+        <p:spPr>
+          <a:xfrm>
+            <a:off x="640080" y="2286000"/>
+            <a:ext cx="10972800" cy="2286000"/>
+          </a:xfrm>
+          <a:prstGeom prst="rect">
+            <a:avLst/>
+          </a:prstGeom>
+          <a:noFill/>
+        </p:spPr>
+        <p:txBody>
+          <a:bodyPr wrap="square">
+            <a:spAutoFit/>
+          </a:bodyPr>
+          <a:lstStyle/>
+          <a:p>
+            <a:r>
+              <a:rPr sz="1600" b="1">
+                <a:solidFill>
+                  <a:srgbClr val="14B8A6"/>
+                </a:solidFill>
+                <a:latin typeface="Calibri"/>
+              </a:rPr>
+              <a:t>APPENDIX</a:t>
+            </a:r>
+          </a:p>
+          <a:p>
+            <a:r>
+              <a:rPr sz="3200" b="1">
+                <a:solidFill>
+                  <a:srgbClr val="FFFFFF"/>
+                </a:solidFill>
+                <a:latin typeface="Calibri"/>
+              </a:rPr>
+              <a:t>Earn · Process · Burn — full sequence board</a:t>
+            </a:r>
+          </a:p>
+          <a:p>
+            <a:r>
+              <a:rPr sz="1800">
+                <a:solidFill>
+                  <a:srgbClr val="94A3B8"/>
+                </a:solidFill>
+                <a:latin typeface="Calibri"/>
+              </a:rPr>
+              <a:t>Split into 2 slides (readable HTML board)</a:t>
+            </a:r>
+          </a:p>
+        </p:txBody>
+      </p:sp>
+    </p:spTree>
+  </p:cSld>
+  <p:clrMapOvr>
+    <a:masterClrMapping/>
+  </p:clrMapOvr>
+</p:sld>
+</file>
+
+<file path=ppt/slides/slide25.xml><?xml version="1.0" encoding="utf-8"?>
+<p:sld xmlns:a="http://schemas.openxmlformats.org/drawingml/2006/main" xmlns:p="http://schemas.openxmlformats.org/presentationml/2006/main" xmlns:r="http://schemas.openxmlformats.org/officeDocument/2006/relationships">
+  <p:cSld>
+    <p:spTree>
+      <p:nvGrpSpPr>
+        <p:cNvPr id="1" name=""/>
+        <p:cNvGrpSpPr/>
+        <p:nvPr/>
+      </p:nvGrpSpPr>
+      <p:grpSpPr/>
+      <p:sp>
+        <p:nvSpPr>
+          <p:cNvPr id="2" name="Rectangle 1"/>
+          <p:cNvSpPr/>
+          <p:nvPr/>
+        </p:nvSpPr>
+        <p:spPr>
+          <a:xfrm>
+            <a:off x="0" y="0"/>
+            <a:ext cx="12192000" cy="6858000"/>
+          </a:xfrm>
+          <a:prstGeom prst="rect">
+            <a:avLst/>
+          </a:prstGeom>
+          <a:solidFill>
+            <a:srgbClr val="0B1220"/>
+          </a:solidFill>
+          <a:ln>
+            <a:noFill/>
+          </a:ln>
+        </p:spPr>
+        <p:style>
+          <a:lnRef idx="1">
+            <a:schemeClr val="accent1"/>
+          </a:lnRef>
+          <a:fillRef idx="3">
+            <a:schemeClr val="accent1"/>
+          </a:fillRef>
+          <a:effectRef idx="2">
+            <a:schemeClr val="accent1"/>
+          </a:effectRef>
+          <a:fontRef idx="minor">
+            <a:schemeClr val="lt1"/>
+          </a:fontRef>
+        </p:style>
+        <p:txBody>
+          <a:bodyPr rtlCol="0" anchor="ctr"/>
+          <a:lstStyle/>
+          <a:p>
+            <a:pPr algn="ctr"/>
+          </a:p>
+        </p:txBody>
+      </p:sp>
+      <p:sp>
+        <p:nvSpPr>
+          <p:cNvPr id="3" name="TextBox 2"/>
+          <p:cNvSpPr txBox="1"/>
+          <p:nvPr/>
+        </p:nvSpPr>
+        <p:spPr>
+          <a:xfrm>
+            <a:off x="365760" y="109728"/>
+            <a:ext cx="11430000" cy="320040"/>
+          </a:xfrm>
+          <a:prstGeom prst="rect">
+            <a:avLst/>
+          </a:prstGeom>
+          <a:noFill/>
+        </p:spPr>
+        <p:txBody>
+          <a:bodyPr wrap="none">
+            <a:spAutoFit/>
+          </a:bodyPr>
+          <a:lstStyle/>
+          <a:p>
+            <a:r>
+              <a:rPr sz="1300" b="1">
+                <a:solidFill>
+                  <a:srgbClr val="14B8A6"/>
+                </a:solidFill>
+                <a:latin typeface="Calibri"/>
+              </a:rPr>
+              <a:t>APPENDIX A1  ·  Sequence board (1/2)  ·  Transaction → Earn</a:t>
+            </a:r>
+          </a:p>
+        </p:txBody>
+      </p:sp>
+      <p:pic>
+        <p:nvPicPr>
+          <p:cNvPr id="4" name="Picture 3" descr="uaf-earn-burn-appendix-1.png"/>
+          <p:cNvPicPr>
+            <a:picLocks noChangeAspect="1"/>
+          </p:cNvPicPr>
+          <p:nvPr/>
+        </p:nvPicPr>
+        <p:blipFill>
+          <a:blip r:embed="rId2"/>
+          <a:stretch>
+            <a:fillRect/>
+          </a:stretch>
+        </p:blipFill>
+        <p:spPr>
+          <a:xfrm>
+            <a:off x="3883495" y="548639"/>
+            <a:ext cx="4394528" cy="5943600"/>
+          </a:xfrm>
+          <a:prstGeom prst="rect">
+            <a:avLst/>
+          </a:prstGeom>
+        </p:spPr>
+      </p:pic>
+    </p:spTree>
+  </p:cSld>
+  <p:clrMapOvr>
+    <a:masterClrMapping/>
+  </p:clrMapOvr>
+</p:sld>
+</file>
+
+<file path=ppt/slides/slide26.xml><?xml version="1.0" encoding="utf-8"?>
+<p:sld xmlns:a="http://schemas.openxmlformats.org/drawingml/2006/main" xmlns:p="http://schemas.openxmlformats.org/presentationml/2006/main" xmlns:r="http://schemas.openxmlformats.org/officeDocument/2006/relationships">
+  <p:cSld>
+    <p:spTree>
+      <p:nvGrpSpPr>
+        <p:cNvPr id="1" name=""/>
+        <p:cNvGrpSpPr/>
+        <p:nvPr/>
+      </p:nvGrpSpPr>
+      <p:grpSpPr/>
+      <p:sp>
+        <p:nvSpPr>
+          <p:cNvPr id="2" name="Rectangle 1"/>
+          <p:cNvSpPr/>
+          <p:nvPr/>
+        </p:nvSpPr>
+        <p:spPr>
+          <a:xfrm>
+            <a:off x="0" y="0"/>
+            <a:ext cx="12192000" cy="6858000"/>
+          </a:xfrm>
+          <a:prstGeom prst="rect">
+            <a:avLst/>
+          </a:prstGeom>
+          <a:solidFill>
+            <a:srgbClr val="0B1220"/>
+          </a:solidFill>
+          <a:ln>
+            <a:noFill/>
+          </a:ln>
+        </p:spPr>
+        <p:style>
+          <a:lnRef idx="1">
+            <a:schemeClr val="accent1"/>
+          </a:lnRef>
+          <a:fillRef idx="3">
+            <a:schemeClr val="accent1"/>
+          </a:fillRef>
+          <a:effectRef idx="2">
+            <a:schemeClr val="accent1"/>
+          </a:effectRef>
+          <a:fontRef idx="minor">
+            <a:schemeClr val="lt1"/>
+          </a:fontRef>
+        </p:style>
+        <p:txBody>
+          <a:bodyPr rtlCol="0" anchor="ctr"/>
+          <a:lstStyle/>
+          <a:p>
+            <a:pPr algn="ctr"/>
+          </a:p>
+        </p:txBody>
+      </p:sp>
+      <p:sp>
+        <p:nvSpPr>
+          <p:cNvPr id="3" name="TextBox 2"/>
+          <p:cNvSpPr txBox="1"/>
+          <p:nvPr/>
+        </p:nvSpPr>
+        <p:spPr>
+          <a:xfrm>
+            <a:off x="365760" y="109728"/>
+            <a:ext cx="11430000" cy="320040"/>
+          </a:xfrm>
+          <a:prstGeom prst="rect">
+            <a:avLst/>
+          </a:prstGeom>
+          <a:noFill/>
+        </p:spPr>
+        <p:txBody>
+          <a:bodyPr wrap="none">
+            <a:spAutoFit/>
+          </a:bodyPr>
+          <a:lstStyle/>
+          <a:p>
+            <a:r>
+              <a:rPr sz="1300" b="1">
+                <a:solidFill>
+                  <a:srgbClr val="14B8A6"/>
+                </a:solidFill>
+                <a:latin typeface="Calibri"/>
+              </a:rPr>
+              <a:t>APPENDIX A2  ·  Sequence board (2/2)  ·  Result → Burn + summary</a:t>
+            </a:r>
+          </a:p>
+        </p:txBody>
+      </p:sp>
+      <p:pic>
+        <p:nvPicPr>
+          <p:cNvPr id="4" name="Picture 3" descr="uaf-earn-burn-appendix-2.png"/>
+          <p:cNvPicPr>
+            <a:picLocks noChangeAspect="1"/>
+          </p:cNvPicPr>
+          <p:nvPr/>
+        </p:nvPicPr>
+        <p:blipFill>
+          <a:blip r:embed="rId2"/>
+          <a:stretch>
+            <a:fillRect/>
+          </a:stretch>
+        </p:blipFill>
+        <p:spPr>
+          <a:xfrm>
+            <a:off x="3150472" y="548639"/>
+            <a:ext cx="5860575" cy="5943600"/>
+          </a:xfrm>
+          <a:prstGeom prst="rect">
+            <a:avLst/>
+          </a:prstGeom>
+        </p:spPr>
+      </p:pic>
+    </p:spTree>
+  </p:cSld>
+  <p:clrMapOvr>
+    <a:masterClrMapping/>
+  </p:clrMapOvr>
+</p:sld>
+</file>
+
 <file path=ppt/slides/slide3.xml><?xml version="1.0" encoding="utf-8"?>
 <p:sld xmlns:a="http://schemas.openxmlformats.org/drawingml/2006/main" xmlns:r="http://schemas.openxmlformats.org/officeDocument/2006/relationships" xmlns:p="http://schemas.openxmlformats.org/presentationml/2006/main">
   <p:cSld name="Slide 3">
